--- a/Docs/Sesión_1_MFDL.pptx
+++ b/Docs/Sesión_1_MFDL.pptx
@@ -1048,6 +1048,13 @@
     <dgm:pt modelId="{AD2C61C3-E581-48B5-A675-2D02620D6F3C}" type="pres">
       <dgm:prSet presAssocID="{CA32C9C6-FA48-4236-A80F-783DC7FDF937}" presName="circ1" presStyleLbl="vennNode1" presStyleIdx="0" presStyleCnt="3"/>
       <dgm:spPr/>
+      <dgm:t>
+        <a:bodyPr/>
+        <a:lstStyle/>
+        <a:p>
+          <a:endParaRPr lang="es-MX"/>
+        </a:p>
+      </dgm:t>
     </dgm:pt>
     <dgm:pt modelId="{D479A919-B692-4CF8-8D15-1A6432AE1878}" type="pres">
       <dgm:prSet presAssocID="{CA32C9C6-FA48-4236-A80F-783DC7FDF937}" presName="circ1Tx" presStyleLbl="revTx" presStyleIdx="0" presStyleCnt="0">
@@ -1058,10 +1065,24 @@
         </dgm:presLayoutVars>
       </dgm:prSet>
       <dgm:spPr/>
+      <dgm:t>
+        <a:bodyPr/>
+        <a:lstStyle/>
+        <a:p>
+          <a:endParaRPr lang="es-MX"/>
+        </a:p>
+      </dgm:t>
     </dgm:pt>
     <dgm:pt modelId="{7B1088B7-8387-4B1D-8D94-3E44F0F7F97D}" type="pres">
       <dgm:prSet presAssocID="{BEA50DBE-F3CA-4A6E-8498-EBB4A3D5D2DF}" presName="circ2" presStyleLbl="vennNode1" presStyleIdx="1" presStyleCnt="3"/>
       <dgm:spPr/>
+      <dgm:t>
+        <a:bodyPr/>
+        <a:lstStyle/>
+        <a:p>
+          <a:endParaRPr lang="es-MX"/>
+        </a:p>
+      </dgm:t>
     </dgm:pt>
     <dgm:pt modelId="{25D2EDD9-D718-4E98-8970-530B744AA90F}" type="pres">
       <dgm:prSet presAssocID="{BEA50DBE-F3CA-4A6E-8498-EBB4A3D5D2DF}" presName="circ2Tx" presStyleLbl="revTx" presStyleIdx="0" presStyleCnt="0">
@@ -1072,10 +1093,24 @@
         </dgm:presLayoutVars>
       </dgm:prSet>
       <dgm:spPr/>
+      <dgm:t>
+        <a:bodyPr/>
+        <a:lstStyle/>
+        <a:p>
+          <a:endParaRPr lang="es-MX"/>
+        </a:p>
+      </dgm:t>
     </dgm:pt>
     <dgm:pt modelId="{358DF6E2-B241-42B8-B077-196CABEA0657}" type="pres">
       <dgm:prSet presAssocID="{EF70572B-9E37-4E17-89B2-3827133715AA}" presName="circ3" presStyleLbl="vennNode1" presStyleIdx="2" presStyleCnt="3"/>
       <dgm:spPr/>
+      <dgm:t>
+        <a:bodyPr/>
+        <a:lstStyle/>
+        <a:p>
+          <a:endParaRPr lang="es-MX"/>
+        </a:p>
+      </dgm:t>
     </dgm:pt>
     <dgm:pt modelId="{84B3E876-3915-4A3E-AFD5-7048DA0662BD}" type="pres">
       <dgm:prSet presAssocID="{EF70572B-9E37-4E17-89B2-3827133715AA}" presName="circ3Tx" presStyleLbl="revTx" presStyleIdx="0" presStyleCnt="0">
@@ -1086,19 +1121,26 @@
         </dgm:presLayoutVars>
       </dgm:prSet>
       <dgm:spPr/>
+      <dgm:t>
+        <a:bodyPr/>
+        <a:lstStyle/>
+        <a:p>
+          <a:endParaRPr lang="es-MX"/>
+        </a:p>
+      </dgm:t>
     </dgm:pt>
   </dgm:ptLst>
   <dgm:cxnLst>
+    <dgm:cxn modelId="{AD6A7CDF-86B6-4223-B236-F2DC08E5B05A}" srcId="{C1CA1C7D-752A-4584-8D3F-A04D2BAD6058}" destId="{BEA50DBE-F3CA-4A6E-8498-EBB4A3D5D2DF}" srcOrd="1" destOrd="0" parTransId="{B2D3EE0F-5012-4B43-8815-EF93503AAAED}" sibTransId="{D392F1ED-1AEA-4EA3-9F2E-910E8E50C06B}"/>
+    <dgm:cxn modelId="{6BF580DE-6A22-417E-B5F1-E0632889256A}" type="presOf" srcId="{BEA50DBE-F3CA-4A6E-8498-EBB4A3D5D2DF}" destId="{7B1088B7-8387-4B1D-8D94-3E44F0F7F97D}" srcOrd="0" destOrd="0" presId="urn:microsoft.com/office/officeart/2005/8/layout/venn1"/>
+    <dgm:cxn modelId="{A9C7E0EB-260C-4D54-917A-4D1448CE72EA}" srcId="{C1CA1C7D-752A-4584-8D3F-A04D2BAD6058}" destId="{EF70572B-9E37-4E17-89B2-3827133715AA}" srcOrd="2" destOrd="0" parTransId="{FA2DD8B4-ED96-4160-81A5-E70B7316E70E}" sibTransId="{F0AE77E0-A5ED-491F-A8CC-E6816EBBBB3E}"/>
+    <dgm:cxn modelId="{F564B6D3-487F-429A-9E81-5B1017821752}" type="presOf" srcId="{CA32C9C6-FA48-4236-A80F-783DC7FDF937}" destId="{D479A919-B692-4CF8-8D15-1A6432AE1878}" srcOrd="1" destOrd="0" presId="urn:microsoft.com/office/officeart/2005/8/layout/venn1"/>
     <dgm:cxn modelId="{AF164808-B56F-4885-BCCB-77EF509F0D89}" type="presOf" srcId="{EF70572B-9E37-4E17-89B2-3827133715AA}" destId="{84B3E876-3915-4A3E-AFD5-7048DA0662BD}" srcOrd="1" destOrd="0" presId="urn:microsoft.com/office/officeart/2005/8/layout/venn1"/>
+    <dgm:cxn modelId="{6AD9FFCC-7644-4F95-B62D-0DD5261448EF}" type="presOf" srcId="{BEA50DBE-F3CA-4A6E-8498-EBB4A3D5D2DF}" destId="{25D2EDD9-D718-4E98-8970-530B744AA90F}" srcOrd="1" destOrd="0" presId="urn:microsoft.com/office/officeart/2005/8/layout/venn1"/>
+    <dgm:cxn modelId="{3C5CD44F-F6B1-42BB-9241-D65B3CD83E6C}" srcId="{C1CA1C7D-752A-4584-8D3F-A04D2BAD6058}" destId="{CA32C9C6-FA48-4236-A80F-783DC7FDF937}" srcOrd="0" destOrd="0" parTransId="{9D64A77D-8FF6-42F4-ACAE-C80E3CE36165}" sibTransId="{5ABE2C0B-2D0C-41B0-99FE-A922040AD1F0}"/>
+    <dgm:cxn modelId="{46B011A8-E6FD-43F6-A3B6-CE5B7751296D}" type="presOf" srcId="{EF70572B-9E37-4E17-89B2-3827133715AA}" destId="{358DF6E2-B241-42B8-B077-196CABEA0657}" srcOrd="0" destOrd="0" presId="urn:microsoft.com/office/officeart/2005/8/layout/venn1"/>
+    <dgm:cxn modelId="{339B1AA2-600D-4D72-8BDE-84E97EC385A2}" type="presOf" srcId="{C1CA1C7D-752A-4584-8D3F-A04D2BAD6058}" destId="{B5286C5D-BC51-420B-B77D-3BD5AAE62ACD}" srcOrd="0" destOrd="0" presId="urn:microsoft.com/office/officeart/2005/8/layout/venn1"/>
     <dgm:cxn modelId="{F4D0BD6C-A918-42B0-A659-FC2BA4FCEACD}" type="presOf" srcId="{CA32C9C6-FA48-4236-A80F-783DC7FDF937}" destId="{AD2C61C3-E581-48B5-A675-2D02620D6F3C}" srcOrd="0" destOrd="0" presId="urn:microsoft.com/office/officeart/2005/8/layout/venn1"/>
-    <dgm:cxn modelId="{3C5CD44F-F6B1-42BB-9241-D65B3CD83E6C}" srcId="{C1CA1C7D-752A-4584-8D3F-A04D2BAD6058}" destId="{CA32C9C6-FA48-4236-A80F-783DC7FDF937}" srcOrd="0" destOrd="0" parTransId="{9D64A77D-8FF6-42F4-ACAE-C80E3CE36165}" sibTransId="{5ABE2C0B-2D0C-41B0-99FE-A922040AD1F0}"/>
-    <dgm:cxn modelId="{339B1AA2-600D-4D72-8BDE-84E97EC385A2}" type="presOf" srcId="{C1CA1C7D-752A-4584-8D3F-A04D2BAD6058}" destId="{B5286C5D-BC51-420B-B77D-3BD5AAE62ACD}" srcOrd="0" destOrd="0" presId="urn:microsoft.com/office/officeart/2005/8/layout/venn1"/>
-    <dgm:cxn modelId="{46B011A8-E6FD-43F6-A3B6-CE5B7751296D}" type="presOf" srcId="{EF70572B-9E37-4E17-89B2-3827133715AA}" destId="{358DF6E2-B241-42B8-B077-196CABEA0657}" srcOrd="0" destOrd="0" presId="urn:microsoft.com/office/officeart/2005/8/layout/venn1"/>
-    <dgm:cxn modelId="{6AD9FFCC-7644-4F95-B62D-0DD5261448EF}" type="presOf" srcId="{BEA50DBE-F3CA-4A6E-8498-EBB4A3D5D2DF}" destId="{25D2EDD9-D718-4E98-8970-530B744AA90F}" srcOrd="1" destOrd="0" presId="urn:microsoft.com/office/officeart/2005/8/layout/venn1"/>
-    <dgm:cxn modelId="{F564B6D3-487F-429A-9E81-5B1017821752}" type="presOf" srcId="{CA32C9C6-FA48-4236-A80F-783DC7FDF937}" destId="{D479A919-B692-4CF8-8D15-1A6432AE1878}" srcOrd="1" destOrd="0" presId="urn:microsoft.com/office/officeart/2005/8/layout/venn1"/>
-    <dgm:cxn modelId="{6BF580DE-6A22-417E-B5F1-E0632889256A}" type="presOf" srcId="{BEA50DBE-F3CA-4A6E-8498-EBB4A3D5D2DF}" destId="{7B1088B7-8387-4B1D-8D94-3E44F0F7F97D}" srcOrd="0" destOrd="0" presId="urn:microsoft.com/office/officeart/2005/8/layout/venn1"/>
-    <dgm:cxn modelId="{AD6A7CDF-86B6-4223-B236-F2DC08E5B05A}" srcId="{C1CA1C7D-752A-4584-8D3F-A04D2BAD6058}" destId="{BEA50DBE-F3CA-4A6E-8498-EBB4A3D5D2DF}" srcOrd="1" destOrd="0" parTransId="{B2D3EE0F-5012-4B43-8815-EF93503AAAED}" sibTransId="{D392F1ED-1AEA-4EA3-9F2E-910E8E50C06B}"/>
-    <dgm:cxn modelId="{A9C7E0EB-260C-4D54-917A-4D1448CE72EA}" srcId="{C1CA1C7D-752A-4584-8D3F-A04D2BAD6058}" destId="{EF70572B-9E37-4E17-89B2-3827133715AA}" srcOrd="2" destOrd="0" parTransId="{FA2DD8B4-ED96-4160-81A5-E70B7316E70E}" sibTransId="{F0AE77E0-A5ED-491F-A8CC-E6816EBBBB3E}"/>
     <dgm:cxn modelId="{7CFB5B13-7E2B-4BFE-97B7-C6C3944B32CE}" type="presParOf" srcId="{B5286C5D-BC51-420B-B77D-3BD5AAE62ACD}" destId="{AD2C61C3-E581-48B5-A675-2D02620D6F3C}" srcOrd="0" destOrd="0" presId="urn:microsoft.com/office/officeart/2005/8/layout/venn1"/>
     <dgm:cxn modelId="{EA3B0CBB-F53B-48E5-8432-3A00D2E85113}" type="presParOf" srcId="{B5286C5D-BC51-420B-B77D-3BD5AAE62ACD}" destId="{D479A919-B692-4CF8-8D15-1A6432AE1878}" srcOrd="1" destOrd="0" presId="urn:microsoft.com/office/officeart/2005/8/layout/venn1"/>
     <dgm:cxn modelId="{8E742AAC-EA4F-47E3-9BA3-5E9F6FEC480F}" type="presParOf" srcId="{B5286C5D-BC51-420B-B77D-3BD5AAE62ACD}" destId="{7B1088B7-8387-4B1D-8D94-3E44F0F7F97D}" srcOrd="2" destOrd="0" presId="urn:microsoft.com/office/officeart/2005/8/layout/venn1"/>
@@ -1183,7 +1225,7 @@
         </a:bodyPr>
         <a:lstStyle/>
         <a:p>
-          <a:pPr marL="0" lvl="0" indent="0" algn="ctr" defTabSz="800100">
+          <a:pPr lvl="0" algn="ctr" defTabSz="800100">
             <a:lnSpc>
               <a:spcPct val="90000"/>
             </a:lnSpc>
@@ -1193,7 +1235,6 @@
             <a:spcAft>
               <a:spcPct val="35000"/>
             </a:spcAft>
-            <a:buNone/>
           </a:pPr>
           <a:r>
             <a:rPr lang="es-MX" sz="1800" kern="1200" dirty="0">
@@ -1264,7 +1305,7 @@
         </a:bodyPr>
         <a:lstStyle/>
         <a:p>
-          <a:pPr marL="0" lvl="0" indent="0" algn="ctr" defTabSz="800100">
+          <a:pPr lvl="0" algn="ctr" defTabSz="800100">
             <a:lnSpc>
               <a:spcPct val="90000"/>
             </a:lnSpc>
@@ -1274,7 +1315,6 @@
             <a:spcAft>
               <a:spcPct val="35000"/>
             </a:spcAft>
-            <a:buNone/>
           </a:pPr>
           <a:r>
             <a:rPr lang="es-MX" sz="1800" kern="1200" dirty="0">
@@ -1345,7 +1385,7 @@
         </a:bodyPr>
         <a:lstStyle/>
         <a:p>
-          <a:pPr marL="0" lvl="0" indent="0" algn="ctr" defTabSz="800100">
+          <a:pPr lvl="0" algn="ctr" defTabSz="800100">
             <a:lnSpc>
               <a:spcPct val="90000"/>
             </a:lnSpc>
@@ -1355,7 +1395,6 @@
             <a:spcAft>
               <a:spcPct val="35000"/>
             </a:spcAft>
-            <a:buNone/>
           </a:pPr>
           <a:r>
             <a:rPr lang="es-MX" sz="1800" kern="1200" dirty="0">
@@ -3414,7 +3453,7 @@
           <a:p>
             <a:fld id="{3975E14E-3399-4729-9487-008C58F41F51}" type="datetimeFigureOut">
               <a:rPr lang="es-MX" smtClean="0"/>
-              <a:t>28/02/2026</a:t>
+              <a:t>01/03/2026</a:t>
             </a:fld>
             <a:endParaRPr lang="es-MX"/>
           </a:p>
@@ -3456,7 +3495,7 @@
           <a:p>
             <a:fld id="{91704CA6-9F73-4A6D-BC4D-1B760B372A0E}" type="slidenum">
               <a:rPr lang="es-MX" smtClean="0"/>
-              <a:t>‹#›</a:t>
+              <a:t>‹Nº›</a:t>
             </a:fld>
             <a:endParaRPr lang="es-MX"/>
           </a:p>
@@ -3584,7 +3623,7 @@
           <a:p>
             <a:fld id="{3975E14E-3399-4729-9487-008C58F41F51}" type="datetimeFigureOut">
               <a:rPr lang="es-MX" smtClean="0"/>
-              <a:t>28/02/2026</a:t>
+              <a:t>01/03/2026</a:t>
             </a:fld>
             <a:endParaRPr lang="es-MX"/>
           </a:p>
@@ -3626,7 +3665,7 @@
           <a:p>
             <a:fld id="{91704CA6-9F73-4A6D-BC4D-1B760B372A0E}" type="slidenum">
               <a:rPr lang="es-MX" smtClean="0"/>
-              <a:t>‹#›</a:t>
+              <a:t>‹Nº›</a:t>
             </a:fld>
             <a:endParaRPr lang="es-MX"/>
           </a:p>
@@ -3764,7 +3803,7 @@
           <a:p>
             <a:fld id="{3975E14E-3399-4729-9487-008C58F41F51}" type="datetimeFigureOut">
               <a:rPr lang="es-MX" smtClean="0"/>
-              <a:t>28/02/2026</a:t>
+              <a:t>01/03/2026</a:t>
             </a:fld>
             <a:endParaRPr lang="es-MX"/>
           </a:p>
@@ -3806,7 +3845,7 @@
           <a:p>
             <a:fld id="{91704CA6-9F73-4A6D-BC4D-1B760B372A0E}" type="slidenum">
               <a:rPr lang="es-MX" smtClean="0"/>
-              <a:t>‹#›</a:t>
+              <a:t>‹Nº›</a:t>
             </a:fld>
             <a:endParaRPr lang="es-MX"/>
           </a:p>
@@ -3934,7 +3973,7 @@
           <a:p>
             <a:fld id="{3975E14E-3399-4729-9487-008C58F41F51}" type="datetimeFigureOut">
               <a:rPr lang="es-MX" smtClean="0"/>
-              <a:t>28/02/2026</a:t>
+              <a:t>01/03/2026</a:t>
             </a:fld>
             <a:endParaRPr lang="es-MX"/>
           </a:p>
@@ -3976,7 +4015,7 @@
           <a:p>
             <a:fld id="{91704CA6-9F73-4A6D-BC4D-1B760B372A0E}" type="slidenum">
               <a:rPr lang="es-MX" smtClean="0"/>
-              <a:t>‹#›</a:t>
+              <a:t>‹Nº›</a:t>
             </a:fld>
             <a:endParaRPr lang="es-MX"/>
           </a:p>
@@ -4180,7 +4219,7 @@
           <a:p>
             <a:fld id="{3975E14E-3399-4729-9487-008C58F41F51}" type="datetimeFigureOut">
               <a:rPr lang="es-MX" smtClean="0"/>
-              <a:t>28/02/2026</a:t>
+              <a:t>01/03/2026</a:t>
             </a:fld>
             <a:endParaRPr lang="es-MX"/>
           </a:p>
@@ -4222,7 +4261,7 @@
           <a:p>
             <a:fld id="{91704CA6-9F73-4A6D-BC4D-1B760B372A0E}" type="slidenum">
               <a:rPr lang="es-MX" smtClean="0"/>
-              <a:t>‹#›</a:t>
+              <a:t>‹Nº›</a:t>
             </a:fld>
             <a:endParaRPr lang="es-MX"/>
           </a:p>
@@ -4412,7 +4451,7 @@
           <a:p>
             <a:fld id="{3975E14E-3399-4729-9487-008C58F41F51}" type="datetimeFigureOut">
               <a:rPr lang="es-MX" smtClean="0"/>
-              <a:t>28/02/2026</a:t>
+              <a:t>01/03/2026</a:t>
             </a:fld>
             <a:endParaRPr lang="es-MX"/>
           </a:p>
@@ -4454,7 +4493,7 @@
           <a:p>
             <a:fld id="{91704CA6-9F73-4A6D-BC4D-1B760B372A0E}" type="slidenum">
               <a:rPr lang="es-MX" smtClean="0"/>
-              <a:t>‹#›</a:t>
+              <a:t>‹Nº›</a:t>
             </a:fld>
             <a:endParaRPr lang="es-MX"/>
           </a:p>
@@ -4779,7 +4818,7 @@
           <a:p>
             <a:fld id="{3975E14E-3399-4729-9487-008C58F41F51}" type="datetimeFigureOut">
               <a:rPr lang="es-MX" smtClean="0"/>
-              <a:t>28/02/2026</a:t>
+              <a:t>01/03/2026</a:t>
             </a:fld>
             <a:endParaRPr lang="es-MX"/>
           </a:p>
@@ -4821,7 +4860,7 @@
           <a:p>
             <a:fld id="{91704CA6-9F73-4A6D-BC4D-1B760B372A0E}" type="slidenum">
               <a:rPr lang="es-MX" smtClean="0"/>
-              <a:t>‹#›</a:t>
+              <a:t>‹Nº›</a:t>
             </a:fld>
             <a:endParaRPr lang="es-MX"/>
           </a:p>
@@ -4897,7 +4936,7 @@
           <a:p>
             <a:fld id="{3975E14E-3399-4729-9487-008C58F41F51}" type="datetimeFigureOut">
               <a:rPr lang="es-MX" smtClean="0"/>
-              <a:t>28/02/2026</a:t>
+              <a:t>01/03/2026</a:t>
             </a:fld>
             <a:endParaRPr lang="es-MX"/>
           </a:p>
@@ -4939,7 +4978,7 @@
           <a:p>
             <a:fld id="{91704CA6-9F73-4A6D-BC4D-1B760B372A0E}" type="slidenum">
               <a:rPr lang="es-MX" smtClean="0"/>
-              <a:t>‹#›</a:t>
+              <a:t>‹Nº›</a:t>
             </a:fld>
             <a:endParaRPr lang="es-MX"/>
           </a:p>
@@ -4992,7 +5031,7 @@
           <a:p>
             <a:fld id="{3975E14E-3399-4729-9487-008C58F41F51}" type="datetimeFigureOut">
               <a:rPr lang="es-MX" smtClean="0"/>
-              <a:t>28/02/2026</a:t>
+              <a:t>01/03/2026</a:t>
             </a:fld>
             <a:endParaRPr lang="es-MX"/>
           </a:p>
@@ -5034,7 +5073,7 @@
           <a:p>
             <a:fld id="{91704CA6-9F73-4A6D-BC4D-1B760B372A0E}" type="slidenum">
               <a:rPr lang="es-MX" smtClean="0"/>
-              <a:t>‹#›</a:t>
+              <a:t>‹Nº›</a:t>
             </a:fld>
             <a:endParaRPr lang="es-MX"/>
           </a:p>
@@ -5269,7 +5308,7 @@
           <a:p>
             <a:fld id="{3975E14E-3399-4729-9487-008C58F41F51}" type="datetimeFigureOut">
               <a:rPr lang="es-MX" smtClean="0"/>
-              <a:t>28/02/2026</a:t>
+              <a:t>01/03/2026</a:t>
             </a:fld>
             <a:endParaRPr lang="es-MX"/>
           </a:p>
@@ -5311,7 +5350,7 @@
           <a:p>
             <a:fld id="{91704CA6-9F73-4A6D-BC4D-1B760B372A0E}" type="slidenum">
               <a:rPr lang="es-MX" smtClean="0"/>
-              <a:t>‹#›</a:t>
+              <a:t>‹Nº›</a:t>
             </a:fld>
             <a:endParaRPr lang="es-MX"/>
           </a:p>
@@ -5522,7 +5561,7 @@
           <a:p>
             <a:fld id="{3975E14E-3399-4729-9487-008C58F41F51}" type="datetimeFigureOut">
               <a:rPr lang="es-MX" smtClean="0"/>
-              <a:t>28/02/2026</a:t>
+              <a:t>01/03/2026</a:t>
             </a:fld>
             <a:endParaRPr lang="es-MX"/>
           </a:p>
@@ -5564,7 +5603,7 @@
           <a:p>
             <a:fld id="{91704CA6-9F73-4A6D-BC4D-1B760B372A0E}" type="slidenum">
               <a:rPr lang="es-MX" smtClean="0"/>
-              <a:t>‹#›</a:t>
+              <a:t>‹Nº›</a:t>
             </a:fld>
             <a:endParaRPr lang="es-MX"/>
           </a:p>
@@ -5744,7 +5783,7 @@
           <a:p>
             <a:fld id="{3975E14E-3399-4729-9487-008C58F41F51}" type="datetimeFigureOut">
               <a:rPr lang="es-MX" smtClean="0"/>
-              <a:t>28/02/2026</a:t>
+              <a:t>01/03/2026</a:t>
             </a:fld>
             <a:endParaRPr lang="es-MX"/>
           </a:p>
@@ -5822,7 +5861,7 @@
           <a:p>
             <a:fld id="{91704CA6-9F73-4A6D-BC4D-1B760B372A0E}" type="slidenum">
               <a:rPr lang="es-MX" smtClean="0"/>
-              <a:t>‹#›</a:t>
+              <a:t>‹Nº›</a:t>
             </a:fld>
             <a:endParaRPr lang="es-MX"/>
           </a:p>
@@ -6623,8 +6662,17 @@
               <a:rPr lang="es-MX" dirty="0">
                 <a:latin typeface="Consolas" panose="020B0609020204030204" pitchFamily="49" charset="0"/>
               </a:rPr>
-              <a:t>la base de remuneraciones</a:t>
-            </a:r>
+              <a:t>la base de </a:t>
+            </a:r>
+            <a:r>
+              <a:rPr lang="es-MX" dirty="0" smtClean="0">
+                <a:latin typeface="Consolas" panose="020B0609020204030204" pitchFamily="49" charset="0"/>
+              </a:rPr>
+              <a:t>rentas</a:t>
+            </a:r>
+            <a:endParaRPr lang="es-MX" dirty="0">
+              <a:latin typeface="Consolas" panose="020B0609020204030204" pitchFamily="49" charset="0"/>
+            </a:endParaRPr>
           </a:p>
           <a:p>
             <a:pPr lvl="1"/>
@@ -6656,8 +6704,17 @@
               <a:rPr lang="es-MX" dirty="0">
                 <a:latin typeface="Consolas" panose="020B0609020204030204" pitchFamily="49" charset="0"/>
               </a:rPr>
-              <a:t> columnas de nombre</a:t>
-            </a:r>
+              <a:t> columnas de </a:t>
+            </a:r>
+            <a:r>
+              <a:rPr lang="es-MX" dirty="0" smtClean="0">
+                <a:latin typeface="Consolas" panose="020B0609020204030204" pitchFamily="49" charset="0"/>
+              </a:rPr>
+              <a:t>ubicación, precio y proximidad</a:t>
+            </a:r>
+            <a:endParaRPr lang="es-MX" dirty="0">
+              <a:latin typeface="Consolas" panose="020B0609020204030204" pitchFamily="49" charset="0"/>
+            </a:endParaRPr>
           </a:p>
           <a:p>
             <a:pPr lvl="1"/>
@@ -6667,6 +6724,21 @@
               </a:rPr>
               <a:t>Generamos columnas </a:t>
             </a:r>
+            <a:r>
+              <a:rPr lang="es-MX" b="1" dirty="0" smtClean="0">
+                <a:solidFill>
+                  <a:schemeClr val="accent1"/>
+                </a:solidFill>
+                <a:latin typeface="Consolas" panose="020B0609020204030204" pitchFamily="49" charset="0"/>
+              </a:rPr>
+              <a:t>condicionales</a:t>
+            </a:r>
+            <a:endParaRPr lang="es-MX" dirty="0">
+              <a:latin typeface="Consolas" panose="020B0609020204030204" pitchFamily="49" charset="0"/>
+            </a:endParaRPr>
+          </a:p>
+          <a:p>
+            <a:pPr lvl="1"/>
             <a:r>
               <a:rPr lang="es-MX" b="1" dirty="0">
                 <a:solidFill>
@@ -6674,32 +6746,23 @@
                 </a:solidFill>
                 <a:latin typeface="Consolas" panose="020B0609020204030204" pitchFamily="49" charset="0"/>
               </a:rPr>
-              <a:t>condicionales</a:t>
+              <a:t>Creamos</a:t>
             </a:r>
             <a:r>
               <a:rPr lang="es-MX" dirty="0">
                 <a:latin typeface="Consolas" panose="020B0609020204030204" pitchFamily="49" charset="0"/>
               </a:rPr>
-              <a:t> al nivel salarial</a:t>
-            </a:r>
-          </a:p>
-          <a:p>
-            <a:pPr lvl="1"/>
-            <a:r>
-              <a:rPr lang="es-MX" b="1" dirty="0">
-                <a:solidFill>
-                  <a:schemeClr val="accent1"/>
-                </a:solidFill>
-                <a:latin typeface="Consolas" panose="020B0609020204030204" pitchFamily="49" charset="0"/>
-              </a:rPr>
-              <a:t>Creamos</a:t>
-            </a:r>
-            <a:r>
-              <a:rPr lang="es-MX" dirty="0">
-                <a:latin typeface="Consolas" panose="020B0609020204030204" pitchFamily="49" charset="0"/>
-              </a:rPr>
-              <a:t> tabla agregada a nivel alcaldía.</a:t>
-            </a:r>
+              <a:t> tabla agregada a nivel </a:t>
+            </a:r>
+            <a:r>
+              <a:rPr lang="es-MX" dirty="0" smtClean="0">
+                <a:latin typeface="Consolas" panose="020B0609020204030204" pitchFamily="49" charset="0"/>
+              </a:rPr>
+              <a:t>ciudades.</a:t>
+            </a:r>
+            <a:endParaRPr lang="es-MX" dirty="0">
+              <a:latin typeface="Consolas" panose="020B0609020204030204" pitchFamily="49" charset="0"/>
+            </a:endParaRPr>
           </a:p>
           <a:p>
             <a:r>
@@ -7443,7 +7506,7 @@
         <p:spPr>
           <a:xfrm>
             <a:off x="838200" y="1422400"/>
-            <a:ext cx="10718800" cy="4978400"/>
+            <a:ext cx="5323703" cy="4978400"/>
           </a:xfrm>
           <a:solidFill>
             <a:srgbClr val="038DD6"/>
@@ -7451,187 +7514,355 @@
         </p:spPr>
         <p:txBody>
           <a:bodyPr>
-            <a:normAutofit lnSpcReduction="10000"/>
+            <a:normAutofit fontScale="55000" lnSpcReduction="20000"/>
           </a:bodyPr>
           <a:lstStyle/>
           <a:p>
             <a:r>
-              <a:rPr lang="es-MX" sz="1800" dirty="0">
-                <a:solidFill>
-                  <a:schemeClr val="bg2"/>
-                </a:solidFill>
-                <a:latin typeface="Consolas" panose="020B0609020204030204" pitchFamily="49" charset="0"/>
-              </a:rPr>
-              <a:t>En 2021, el Gobierno de la Ciudad de México implementó un programa emergente de apoyo a comerciantes de alimentos preparados en vía pública por el contexto de la pandemia de Covid-19. El apoyo consistió en un pago único de $3,000 para solventar gastos durante el periodo suspensión temporal de actividades. </a:t>
-            </a:r>
-          </a:p>
-          <a:p>
-            <a:r>
-              <a:rPr lang="es-MX" sz="1800" dirty="0">
-                <a:solidFill>
-                  <a:schemeClr val="bg2"/>
-                </a:solidFill>
-                <a:latin typeface="Consolas" panose="020B0609020204030204" pitchFamily="49" charset="0"/>
-              </a:rPr>
-              <a:t>Nos interesa indagar sobre la dispersión territorial de los apoyos a nivel alcaldía. Igualmente buscamos desagregar el análisis en grupos de edad y por sexo.</a:t>
-            </a:r>
-          </a:p>
-          <a:p>
-            <a:r>
-              <a:rPr lang="es-MX" sz="1800" b="1" dirty="0">
-                <a:solidFill>
-                  <a:schemeClr val="accent2"/>
-                </a:solidFill>
-                <a:latin typeface="Consolas" panose="020B0609020204030204" pitchFamily="49" charset="0"/>
-              </a:rPr>
-              <a:t>Instrucciones:</a:t>
+              <a:rPr lang="es-MX" dirty="0">
+                <a:latin typeface="Consolas" panose="020B0609020204030204" pitchFamily="49" charset="0"/>
+              </a:rPr>
+              <a:t>Limpiar nombres de variables</a:t>
+            </a:r>
+            <a:r>
+              <a:rPr lang="es-MX" dirty="0" smtClean="0">
+                <a:latin typeface="Consolas" panose="020B0609020204030204" pitchFamily="49" charset="0"/>
+              </a:rPr>
+              <a:t>.</a:t>
+            </a:r>
+          </a:p>
+          <a:p>
+            <a:r>
+              <a:rPr lang="es-MX" dirty="0" smtClean="0">
+                <a:latin typeface="Consolas" panose="020B0609020204030204" pitchFamily="49" charset="0"/>
+              </a:rPr>
+              <a:t>Crear </a:t>
+            </a:r>
+            <a:r>
+              <a:rPr lang="es-MX" dirty="0">
+                <a:latin typeface="Consolas" panose="020B0609020204030204" pitchFamily="49" charset="0"/>
+              </a:rPr>
+              <a:t>variable categórica de proximidad usando </a:t>
+            </a:r>
+            <a:r>
+              <a:rPr lang="es-MX" dirty="0" err="1">
+                <a:latin typeface="Consolas" panose="020B0609020204030204" pitchFamily="49" charset="0"/>
+              </a:rPr>
+              <a:t>proximity_index</a:t>
+            </a:r>
+            <a:r>
+              <a:rPr lang="es-MX" dirty="0" smtClean="0">
+                <a:latin typeface="Consolas" panose="020B0609020204030204" pitchFamily="49" charset="0"/>
+              </a:rPr>
+              <a:t>:</a:t>
             </a:r>
           </a:p>
           <a:p>
             <a:pPr lvl="1"/>
             <a:r>
-              <a:rPr lang="es-MX" sz="1700" dirty="0">
-                <a:solidFill>
-                  <a:schemeClr val="bg2"/>
-                </a:solidFill>
-                <a:latin typeface="Consolas" panose="020B0609020204030204" pitchFamily="49" charset="0"/>
-              </a:rPr>
-              <a:t>Generar un script en R con un pipeline que ejecute las siguientes tareas:</a:t>
-            </a:r>
-          </a:p>
-          <a:p>
-            <a:pPr lvl="2"/>
-            <a:r>
-              <a:rPr lang="es-MX" sz="1600" dirty="0">
-                <a:solidFill>
-                  <a:schemeClr val="bg2"/>
-                </a:solidFill>
-                <a:latin typeface="Consolas" panose="020B0609020204030204" pitchFamily="49" charset="0"/>
-              </a:rPr>
-              <a:t>Crear una columna de nombre completo de la persona beneficiaria con mayúsculas y minúsculas.</a:t>
-            </a:r>
-          </a:p>
-          <a:p>
-            <a:pPr lvl="2"/>
-            <a:r>
-              <a:rPr lang="es-MX" sz="1600" dirty="0">
-                <a:solidFill>
-                  <a:schemeClr val="bg2"/>
-                </a:solidFill>
-                <a:latin typeface="Consolas" panose="020B0609020204030204" pitchFamily="49" charset="0"/>
-              </a:rPr>
-              <a:t>Crear un indicador dicotómico que  señale si la persona recibió o no su dispersión (véase columna “status”)</a:t>
-            </a:r>
-          </a:p>
-          <a:p>
-            <a:pPr lvl="2"/>
-            <a:r>
-              <a:rPr lang="es-MX" sz="1600" dirty="0">
-                <a:solidFill>
-                  <a:schemeClr val="bg2"/>
-                </a:solidFill>
-                <a:latin typeface="Consolas" panose="020B0609020204030204" pitchFamily="49" charset="0"/>
-              </a:rPr>
-              <a:t>Crear una columna de rango de edad que agrupe a los beneficiarios en </a:t>
-            </a:r>
-            <a:r>
-              <a:rPr lang="es-MX" sz="1600" i="1" dirty="0" err="1">
-                <a:solidFill>
-                  <a:schemeClr val="bg2"/>
-                </a:solidFill>
-                <a:latin typeface="Consolas" panose="020B0609020204030204" pitchFamily="49" charset="0"/>
-              </a:rPr>
-              <a:t>bins</a:t>
-            </a:r>
-            <a:r>
-              <a:rPr lang="es-MX" sz="1600" i="1" dirty="0">
-                <a:solidFill>
-                  <a:schemeClr val="bg2"/>
-                </a:solidFill>
-                <a:latin typeface="Consolas" panose="020B0609020204030204" pitchFamily="49" charset="0"/>
-              </a:rPr>
-              <a:t> </a:t>
-            </a:r>
-            <a:r>
-              <a:rPr lang="es-MX" sz="1600" dirty="0">
-                <a:solidFill>
-                  <a:schemeClr val="bg2"/>
-                </a:solidFill>
-                <a:latin typeface="Consolas" panose="020B0609020204030204" pitchFamily="49" charset="0"/>
-              </a:rPr>
-              <a:t>consistentes con la distribución de la columna “edad” (</a:t>
-            </a:r>
-            <a:r>
-              <a:rPr lang="es-MX" sz="1600" dirty="0" err="1">
-                <a:solidFill>
-                  <a:schemeClr val="bg2"/>
-                </a:solidFill>
-                <a:latin typeface="Consolas" panose="020B0609020204030204" pitchFamily="49" charset="0"/>
-              </a:rPr>
-              <a:t>case_when</a:t>
-            </a:r>
-            <a:r>
-              <a:rPr lang="es-MX" sz="1600" dirty="0">
-                <a:solidFill>
-                  <a:schemeClr val="bg2"/>
-                </a:solidFill>
-                <a:latin typeface="Consolas" panose="020B0609020204030204" pitchFamily="49" charset="0"/>
-              </a:rPr>
-              <a:t>()).</a:t>
-            </a:r>
-          </a:p>
-          <a:p>
-            <a:pPr lvl="2"/>
-            <a:r>
-              <a:rPr lang="es-MX" sz="1600" dirty="0">
-                <a:solidFill>
-                  <a:schemeClr val="bg2"/>
-                </a:solidFill>
-                <a:latin typeface="Consolas" panose="020B0609020204030204" pitchFamily="49" charset="0"/>
-              </a:rPr>
-              <a:t>Crear una tabla resumen que sume (sum()) el monto total dispersado a nivel alcaldía.</a:t>
-            </a:r>
-          </a:p>
-          <a:p>
-            <a:pPr lvl="2"/>
-            <a:r>
-              <a:rPr lang="es-MX" sz="1600" dirty="0">
-                <a:solidFill>
-                  <a:schemeClr val="bg2"/>
-                </a:solidFill>
-                <a:latin typeface="Consolas" panose="020B0609020204030204" pitchFamily="49" charset="0"/>
-              </a:rPr>
-              <a:t>Exportar la base limpia con las columnas generadas (eliminando columnas redundantes) y la tabla resumen a dos archivos Excel en la carpeta </a:t>
-            </a:r>
-            <a:r>
-              <a:rPr lang="es-MX" sz="1600" i="1" dirty="0">
-                <a:solidFill>
-                  <a:schemeClr val="bg2"/>
-                </a:solidFill>
-                <a:latin typeface="Consolas" panose="020B0609020204030204" pitchFamily="49" charset="0"/>
-              </a:rPr>
-              <a:t>Outputs</a:t>
-            </a:r>
-          </a:p>
-          <a:p>
-            <a:pPr lvl="2"/>
-            <a:r>
-              <a:rPr lang="es-MX" sz="1600" b="1" dirty="0">
-                <a:solidFill>
-                  <a:schemeClr val="accent4"/>
-                </a:solidFill>
-                <a:latin typeface="Consolas" panose="020B0609020204030204" pitchFamily="49" charset="0"/>
-              </a:rPr>
-              <a:t>EXTRA: Desagregar la tabla resumen por sexo y grupos de edad (debe seguir conteniendo una fila por alcaldía).</a:t>
-            </a:r>
-          </a:p>
-          <a:p>
+              <a:rPr lang="es-MX" dirty="0" smtClean="0">
+                <a:latin typeface="Consolas" panose="020B0609020204030204" pitchFamily="49" charset="0"/>
+              </a:rPr>
+              <a:t>≥ </a:t>
+            </a:r>
+            <a:r>
+              <a:rPr lang="es-MX" dirty="0">
+                <a:latin typeface="Consolas" panose="020B0609020204030204" pitchFamily="49" charset="0"/>
+              </a:rPr>
+              <a:t>1.2 → Alta proximidad≥ </a:t>
+            </a:r>
+            <a:endParaRPr lang="es-MX" dirty="0" smtClean="0">
+              <a:latin typeface="Consolas" panose="020B0609020204030204" pitchFamily="49" charset="0"/>
+            </a:endParaRPr>
+          </a:p>
+          <a:p>
+            <a:pPr lvl="1"/>
+            <a:r>
+              <a:rPr lang="es-MX" dirty="0" smtClean="0">
+                <a:latin typeface="Consolas" panose="020B0609020204030204" pitchFamily="49" charset="0"/>
+              </a:rPr>
+              <a:t>0.8 </a:t>
+            </a:r>
+            <a:r>
+              <a:rPr lang="es-MX" dirty="0">
+                <a:latin typeface="Consolas" panose="020B0609020204030204" pitchFamily="49" charset="0"/>
+              </a:rPr>
+              <a:t>y &lt; 1.2 → Proximidad </a:t>
+            </a:r>
+            <a:r>
+              <a:rPr lang="es-MX" dirty="0" smtClean="0">
+                <a:latin typeface="Consolas" panose="020B0609020204030204" pitchFamily="49" charset="0"/>
+              </a:rPr>
+              <a:t>media</a:t>
+            </a:r>
+          </a:p>
+          <a:p>
+            <a:pPr lvl="1"/>
+            <a:r>
+              <a:rPr lang="es-MX" dirty="0" smtClean="0">
+                <a:latin typeface="Consolas" panose="020B0609020204030204" pitchFamily="49" charset="0"/>
+              </a:rPr>
+              <a:t>&lt; </a:t>
+            </a:r>
+            <a:r>
+              <a:rPr lang="es-MX" dirty="0">
+                <a:latin typeface="Consolas" panose="020B0609020204030204" pitchFamily="49" charset="0"/>
+              </a:rPr>
+              <a:t>0.8 → Proximidad </a:t>
+            </a:r>
+            <a:r>
+              <a:rPr lang="es-MX" dirty="0" smtClean="0">
+                <a:latin typeface="Consolas" panose="020B0609020204030204" pitchFamily="49" charset="0"/>
+              </a:rPr>
+              <a:t>baja</a:t>
+            </a:r>
+          </a:p>
+          <a:p>
+            <a:r>
+              <a:rPr lang="es-MX" dirty="0" smtClean="0">
+                <a:latin typeface="Consolas" panose="020B0609020204030204" pitchFamily="49" charset="0"/>
+              </a:rPr>
+              <a:t>Construir </a:t>
+            </a:r>
+            <a:r>
+              <a:rPr lang="es-MX" dirty="0">
+                <a:latin typeface="Consolas" panose="020B0609020204030204" pitchFamily="49" charset="0"/>
+              </a:rPr>
+              <a:t>un índice de valor turístico:𝑖𝑛𝑑𝑖𝑐𝑒=𝑔𝑢𝑒𝑠𝑡_𝑠𝑎𝑡𝑖𝑠𝑓𝑎𝑐𝑡𝑖𝑜𝑛_𝑠𝑐𝑜𝑟𝑒×𝑠𝑎𝑓𝑒𝑡𝑦_𝑖𝑛𝑑𝑒𝑥𝑝𝑟𝑖𝑐𝑒_</a:t>
+            </a:r>
+            <a:r>
+              <a:rPr lang="es-MX" dirty="0" smtClean="0">
+                <a:latin typeface="Consolas" panose="020B0609020204030204" pitchFamily="49" charset="0"/>
+              </a:rPr>
+              <a:t>𝑡𝑜𝑡𝑎𝑙</a:t>
+            </a:r>
+          </a:p>
+          <a:p>
+            <a:r>
+              <a:rPr lang="es-MX" dirty="0" smtClean="0">
+                <a:latin typeface="Consolas" panose="020B0609020204030204" pitchFamily="49" charset="0"/>
+              </a:rPr>
+              <a:t>​</a:t>
+            </a:r>
+            <a:r>
+              <a:rPr lang="es-MX" dirty="0">
+                <a:latin typeface="Consolas" panose="020B0609020204030204" pitchFamily="49" charset="0"/>
+              </a:rPr>
+              <a:t>Agrupar </a:t>
+            </a:r>
+            <a:r>
+              <a:rPr lang="es-MX" dirty="0" smtClean="0">
+                <a:latin typeface="Consolas" panose="020B0609020204030204" pitchFamily="49" charset="0"/>
+              </a:rPr>
+              <a:t>por:</a:t>
+            </a:r>
+          </a:p>
+          <a:p>
+            <a:pPr lvl="1"/>
+            <a:r>
+              <a:rPr lang="es-MX" dirty="0" smtClean="0">
+                <a:latin typeface="Consolas" panose="020B0609020204030204" pitchFamily="49" charset="0"/>
+              </a:rPr>
+              <a:t>Ciudad</a:t>
+            </a:r>
+          </a:p>
+          <a:p>
+            <a:pPr lvl="1"/>
+            <a:r>
+              <a:rPr lang="es-MX" dirty="0" smtClean="0">
+                <a:latin typeface="Consolas" panose="020B0609020204030204" pitchFamily="49" charset="0"/>
+              </a:rPr>
+              <a:t>Tipo </a:t>
+            </a:r>
+            <a:r>
+              <a:rPr lang="es-MX" dirty="0">
+                <a:latin typeface="Consolas" panose="020B0609020204030204" pitchFamily="49" charset="0"/>
+              </a:rPr>
+              <a:t>de habitación (</a:t>
+            </a:r>
+            <a:r>
+              <a:rPr lang="es-MX" dirty="0" err="1">
+                <a:latin typeface="Consolas" panose="020B0609020204030204" pitchFamily="49" charset="0"/>
+              </a:rPr>
+              <a:t>room_type</a:t>
+            </a:r>
+            <a:r>
+              <a:rPr lang="es-MX" dirty="0" smtClean="0">
+                <a:latin typeface="Consolas" panose="020B0609020204030204" pitchFamily="49" charset="0"/>
+              </a:rPr>
+              <a:t>)</a:t>
+            </a:r>
+          </a:p>
+          <a:p>
+            <a:pPr lvl="1"/>
+            <a:r>
+              <a:rPr lang="es-MX" dirty="0" smtClean="0">
+                <a:latin typeface="Consolas" panose="020B0609020204030204" pitchFamily="49" charset="0"/>
+              </a:rPr>
+              <a:t>Categoría </a:t>
+            </a:r>
+            <a:r>
+              <a:rPr lang="es-MX" dirty="0">
+                <a:latin typeface="Consolas" panose="020B0609020204030204" pitchFamily="49" charset="0"/>
+              </a:rPr>
+              <a:t>de </a:t>
+            </a:r>
+            <a:r>
+              <a:rPr lang="es-MX" dirty="0" smtClean="0">
+                <a:latin typeface="Consolas" panose="020B0609020204030204" pitchFamily="49" charset="0"/>
+              </a:rPr>
+              <a:t>proximidad</a:t>
+            </a:r>
+          </a:p>
+          <a:p>
+            <a:r>
+              <a:rPr lang="es-MX" dirty="0" smtClean="0">
+                <a:latin typeface="Consolas" panose="020B0609020204030204" pitchFamily="49" charset="0"/>
+              </a:rPr>
+              <a:t>Calcular </a:t>
+            </a:r>
+            <a:r>
+              <a:rPr lang="es-MX" dirty="0">
+                <a:latin typeface="Consolas" panose="020B0609020204030204" pitchFamily="49" charset="0"/>
+              </a:rPr>
+              <a:t>por grupo</a:t>
+            </a:r>
+            <a:r>
+              <a:rPr lang="es-MX" dirty="0" smtClean="0">
+                <a:latin typeface="Consolas" panose="020B0609020204030204" pitchFamily="49" charset="0"/>
+              </a:rPr>
+              <a:t>:</a:t>
+            </a:r>
+          </a:p>
+          <a:p>
+            <a:pPr lvl="1"/>
+            <a:r>
+              <a:rPr lang="es-MX" dirty="0" smtClean="0">
+                <a:latin typeface="Consolas" panose="020B0609020204030204" pitchFamily="49" charset="0"/>
+              </a:rPr>
+              <a:t>Número </a:t>
+            </a:r>
+            <a:r>
+              <a:rPr lang="es-MX" dirty="0">
+                <a:latin typeface="Consolas" panose="020B0609020204030204" pitchFamily="49" charset="0"/>
+              </a:rPr>
+              <a:t>de </a:t>
+            </a:r>
+            <a:r>
+              <a:rPr lang="es-MX" dirty="0" smtClean="0">
+                <a:latin typeface="Consolas" panose="020B0609020204030204" pitchFamily="49" charset="0"/>
+              </a:rPr>
+              <a:t>propiedades</a:t>
+            </a:r>
+          </a:p>
+          <a:p>
+            <a:pPr lvl="1"/>
+            <a:r>
+              <a:rPr lang="es-MX" dirty="0" smtClean="0">
+                <a:latin typeface="Consolas" panose="020B0609020204030204" pitchFamily="49" charset="0"/>
+              </a:rPr>
+              <a:t>Precio promedio</a:t>
+            </a:r>
+          </a:p>
+          <a:p>
+            <a:pPr lvl="1"/>
+            <a:r>
+              <a:rPr lang="es-MX" dirty="0" smtClean="0">
+                <a:latin typeface="Consolas" panose="020B0609020204030204" pitchFamily="49" charset="0"/>
+              </a:rPr>
+              <a:t>Satisfacción promedio</a:t>
+            </a:r>
+          </a:p>
+          <a:p>
+            <a:pPr lvl="1"/>
+            <a:r>
+              <a:rPr lang="es-MX" dirty="0" smtClean="0">
+                <a:latin typeface="Consolas" panose="020B0609020204030204" pitchFamily="49" charset="0"/>
+              </a:rPr>
+              <a:t>Índice </a:t>
+            </a:r>
+            <a:r>
+              <a:rPr lang="es-MX" dirty="0">
+                <a:latin typeface="Consolas" panose="020B0609020204030204" pitchFamily="49" charset="0"/>
+              </a:rPr>
+              <a:t>de valor turístico </a:t>
+            </a:r>
+            <a:r>
+              <a:rPr lang="es-MX" dirty="0" smtClean="0">
+                <a:latin typeface="Consolas" panose="020B0609020204030204" pitchFamily="49" charset="0"/>
+              </a:rPr>
+              <a:t>promedio</a:t>
+            </a:r>
+          </a:p>
+          <a:p>
+            <a:r>
+              <a:rPr lang="es-MX" dirty="0" smtClean="0">
+                <a:latin typeface="Consolas" panose="020B0609020204030204" pitchFamily="49" charset="0"/>
+              </a:rPr>
+              <a:t>Identificar </a:t>
+            </a:r>
+            <a:r>
+              <a:rPr lang="es-MX" dirty="0">
+                <a:latin typeface="Consolas" panose="020B0609020204030204" pitchFamily="49" charset="0"/>
+              </a:rPr>
+              <a:t>la combinación con mayor índice de valor turístico</a:t>
+            </a:r>
+            <a:r>
+              <a:rPr lang="es-MX" dirty="0" smtClean="0">
+                <a:latin typeface="Consolas" panose="020B0609020204030204" pitchFamily="49" charset="0"/>
+              </a:rPr>
+              <a:t>.</a:t>
+            </a:r>
+          </a:p>
+          <a:p>
+            <a:r>
+              <a:rPr lang="es-MX" dirty="0" smtClean="0">
+                <a:latin typeface="Consolas" panose="020B0609020204030204" pitchFamily="49" charset="0"/>
+              </a:rPr>
+              <a:t>Exportar </a:t>
+            </a:r>
+            <a:r>
+              <a:rPr lang="es-MX" dirty="0">
+                <a:latin typeface="Consolas" panose="020B0609020204030204" pitchFamily="49" charset="0"/>
+              </a:rPr>
+              <a:t>resultados a Excel.</a:t>
+            </a:r>
             <a:endParaRPr lang="es-MX" dirty="0">
               <a:latin typeface="Consolas" panose="020B0609020204030204" pitchFamily="49" charset="0"/>
             </a:endParaRPr>
           </a:p>
         </p:txBody>
       </p:sp>
+      <p:pic>
+        <p:nvPicPr>
+          <p:cNvPr id="4" name="Imagen 3"/>
+          <p:cNvPicPr>
+            <a:picLocks noChangeAspect="1"/>
+          </p:cNvPicPr>
+          <p:nvPr/>
+        </p:nvPicPr>
+        <p:blipFill>
+          <a:blip r:embed="rId2">
+            <a:extLst>
+              <a:ext uri="{28A0092B-C50C-407E-A947-70E740481C1C}">
+                <a14:useLocalDpi xmlns:a14="http://schemas.microsoft.com/office/drawing/2010/main" val="0"/>
+              </a:ext>
+            </a:extLst>
+          </a:blip>
+          <a:stretch>
+            <a:fillRect/>
+          </a:stretch>
+        </p:blipFill>
+        <p:spPr>
+          <a:xfrm>
+            <a:off x="6669056" y="1750639"/>
+            <a:ext cx="4684744" cy="3509220"/>
+          </a:xfrm>
+          <a:prstGeom prst="rect">
+            <a:avLst/>
+          </a:prstGeom>
+        </p:spPr>
+      </p:pic>
     </p:spTree>
     <p:extLst>
       <p:ext uri="{BB962C8B-B14F-4D97-AF65-F5344CB8AC3E}">
@@ -8120,6 +8351,349 @@
                                           <p:spTgt spid="3">
                                             <p:txEl>
                                               <p:pRg st="9" end="9"/>
+                                            </p:txEl>
+                                          </p:spTgt>
+                                        </p:tgtEl>
+                                        <p:attrNameLst>
+                                          <p:attrName>style.visibility</p:attrName>
+                                        </p:attrNameLst>
+                                      </p:cBhvr>
+                                      <p:to>
+                                        <p:strVal val="visible"/>
+                                      </p:to>
+                                    </p:set>
+                                  </p:childTnLst>
+                                </p:cTn>
+                              </p:par>
+                            </p:childTnLst>
+                          </p:cTn>
+                        </p:par>
+                      </p:childTnLst>
+                    </p:cTn>
+                  </p:par>
+                  <p:par>
+                    <p:cTn id="43" fill="hold">
+                      <p:stCondLst>
+                        <p:cond delay="indefinite"/>
+                      </p:stCondLst>
+                      <p:childTnLst>
+                        <p:par>
+                          <p:cTn id="44" fill="hold">
+                            <p:stCondLst>
+                              <p:cond delay="0"/>
+                            </p:stCondLst>
+                            <p:childTnLst>
+                              <p:par>
+                                <p:cTn id="45" presetID="1" presetClass="entr" presetSubtype="0" fill="hold" nodeType="clickEffect">
+                                  <p:stCondLst>
+                                    <p:cond delay="0"/>
+                                  </p:stCondLst>
+                                  <p:childTnLst>
+                                    <p:set>
+                                      <p:cBhvr>
+                                        <p:cTn id="46" dur="1" fill="hold">
+                                          <p:stCondLst>
+                                            <p:cond delay="0"/>
+                                          </p:stCondLst>
+                                        </p:cTn>
+                                        <p:tgtEl>
+                                          <p:spTgt spid="3">
+                                            <p:txEl>
+                                              <p:pRg st="10" end="10"/>
+                                            </p:txEl>
+                                          </p:spTgt>
+                                        </p:tgtEl>
+                                        <p:attrNameLst>
+                                          <p:attrName>style.visibility</p:attrName>
+                                        </p:attrNameLst>
+                                      </p:cBhvr>
+                                      <p:to>
+                                        <p:strVal val="visible"/>
+                                      </p:to>
+                                    </p:set>
+                                  </p:childTnLst>
+                                </p:cTn>
+                              </p:par>
+                            </p:childTnLst>
+                          </p:cTn>
+                        </p:par>
+                      </p:childTnLst>
+                    </p:cTn>
+                  </p:par>
+                  <p:par>
+                    <p:cTn id="47" fill="hold">
+                      <p:stCondLst>
+                        <p:cond delay="indefinite"/>
+                      </p:stCondLst>
+                      <p:childTnLst>
+                        <p:par>
+                          <p:cTn id="48" fill="hold">
+                            <p:stCondLst>
+                              <p:cond delay="0"/>
+                            </p:stCondLst>
+                            <p:childTnLst>
+                              <p:par>
+                                <p:cTn id="49" presetID="1" presetClass="entr" presetSubtype="0" fill="hold" nodeType="clickEffect">
+                                  <p:stCondLst>
+                                    <p:cond delay="0"/>
+                                  </p:stCondLst>
+                                  <p:childTnLst>
+                                    <p:set>
+                                      <p:cBhvr>
+                                        <p:cTn id="50" dur="1" fill="hold">
+                                          <p:stCondLst>
+                                            <p:cond delay="0"/>
+                                          </p:stCondLst>
+                                        </p:cTn>
+                                        <p:tgtEl>
+                                          <p:spTgt spid="3">
+                                            <p:txEl>
+                                              <p:pRg st="11" end="11"/>
+                                            </p:txEl>
+                                          </p:spTgt>
+                                        </p:tgtEl>
+                                        <p:attrNameLst>
+                                          <p:attrName>style.visibility</p:attrName>
+                                        </p:attrNameLst>
+                                      </p:cBhvr>
+                                      <p:to>
+                                        <p:strVal val="visible"/>
+                                      </p:to>
+                                    </p:set>
+                                  </p:childTnLst>
+                                </p:cTn>
+                              </p:par>
+                            </p:childTnLst>
+                          </p:cTn>
+                        </p:par>
+                      </p:childTnLst>
+                    </p:cTn>
+                  </p:par>
+                  <p:par>
+                    <p:cTn id="51" fill="hold">
+                      <p:stCondLst>
+                        <p:cond delay="indefinite"/>
+                      </p:stCondLst>
+                      <p:childTnLst>
+                        <p:par>
+                          <p:cTn id="52" fill="hold">
+                            <p:stCondLst>
+                              <p:cond delay="0"/>
+                            </p:stCondLst>
+                            <p:childTnLst>
+                              <p:par>
+                                <p:cTn id="53" presetID="1" presetClass="entr" presetSubtype="0" fill="hold" nodeType="clickEffect">
+                                  <p:stCondLst>
+                                    <p:cond delay="0"/>
+                                  </p:stCondLst>
+                                  <p:childTnLst>
+                                    <p:set>
+                                      <p:cBhvr>
+                                        <p:cTn id="54" dur="1" fill="hold">
+                                          <p:stCondLst>
+                                            <p:cond delay="0"/>
+                                          </p:stCondLst>
+                                        </p:cTn>
+                                        <p:tgtEl>
+                                          <p:spTgt spid="3">
+                                            <p:txEl>
+                                              <p:pRg st="12" end="12"/>
+                                            </p:txEl>
+                                          </p:spTgt>
+                                        </p:tgtEl>
+                                        <p:attrNameLst>
+                                          <p:attrName>style.visibility</p:attrName>
+                                        </p:attrNameLst>
+                                      </p:cBhvr>
+                                      <p:to>
+                                        <p:strVal val="visible"/>
+                                      </p:to>
+                                    </p:set>
+                                  </p:childTnLst>
+                                </p:cTn>
+                              </p:par>
+                            </p:childTnLst>
+                          </p:cTn>
+                        </p:par>
+                      </p:childTnLst>
+                    </p:cTn>
+                  </p:par>
+                  <p:par>
+                    <p:cTn id="55" fill="hold">
+                      <p:stCondLst>
+                        <p:cond delay="indefinite"/>
+                      </p:stCondLst>
+                      <p:childTnLst>
+                        <p:par>
+                          <p:cTn id="56" fill="hold">
+                            <p:stCondLst>
+                              <p:cond delay="0"/>
+                            </p:stCondLst>
+                            <p:childTnLst>
+                              <p:par>
+                                <p:cTn id="57" presetID="1" presetClass="entr" presetSubtype="0" fill="hold" nodeType="clickEffect">
+                                  <p:stCondLst>
+                                    <p:cond delay="0"/>
+                                  </p:stCondLst>
+                                  <p:childTnLst>
+                                    <p:set>
+                                      <p:cBhvr>
+                                        <p:cTn id="58" dur="1" fill="hold">
+                                          <p:stCondLst>
+                                            <p:cond delay="0"/>
+                                          </p:stCondLst>
+                                        </p:cTn>
+                                        <p:tgtEl>
+                                          <p:spTgt spid="3">
+                                            <p:txEl>
+                                              <p:pRg st="13" end="13"/>
+                                            </p:txEl>
+                                          </p:spTgt>
+                                        </p:tgtEl>
+                                        <p:attrNameLst>
+                                          <p:attrName>style.visibility</p:attrName>
+                                        </p:attrNameLst>
+                                      </p:cBhvr>
+                                      <p:to>
+                                        <p:strVal val="visible"/>
+                                      </p:to>
+                                    </p:set>
+                                  </p:childTnLst>
+                                </p:cTn>
+                              </p:par>
+                            </p:childTnLst>
+                          </p:cTn>
+                        </p:par>
+                      </p:childTnLst>
+                    </p:cTn>
+                  </p:par>
+                  <p:par>
+                    <p:cTn id="59" fill="hold">
+                      <p:stCondLst>
+                        <p:cond delay="indefinite"/>
+                      </p:stCondLst>
+                      <p:childTnLst>
+                        <p:par>
+                          <p:cTn id="60" fill="hold">
+                            <p:stCondLst>
+                              <p:cond delay="0"/>
+                            </p:stCondLst>
+                            <p:childTnLst>
+                              <p:par>
+                                <p:cTn id="61" presetID="1" presetClass="entr" presetSubtype="0" fill="hold" nodeType="clickEffect">
+                                  <p:stCondLst>
+                                    <p:cond delay="0"/>
+                                  </p:stCondLst>
+                                  <p:childTnLst>
+                                    <p:set>
+                                      <p:cBhvr>
+                                        <p:cTn id="62" dur="1" fill="hold">
+                                          <p:stCondLst>
+                                            <p:cond delay="0"/>
+                                          </p:stCondLst>
+                                        </p:cTn>
+                                        <p:tgtEl>
+                                          <p:spTgt spid="3">
+                                            <p:txEl>
+                                              <p:pRg st="14" end="14"/>
+                                            </p:txEl>
+                                          </p:spTgt>
+                                        </p:tgtEl>
+                                        <p:attrNameLst>
+                                          <p:attrName>style.visibility</p:attrName>
+                                        </p:attrNameLst>
+                                      </p:cBhvr>
+                                      <p:to>
+                                        <p:strVal val="visible"/>
+                                      </p:to>
+                                    </p:set>
+                                  </p:childTnLst>
+                                </p:cTn>
+                              </p:par>
+                            </p:childTnLst>
+                          </p:cTn>
+                        </p:par>
+                      </p:childTnLst>
+                    </p:cTn>
+                  </p:par>
+                  <p:par>
+                    <p:cTn id="63" fill="hold">
+                      <p:stCondLst>
+                        <p:cond delay="indefinite"/>
+                      </p:stCondLst>
+                      <p:childTnLst>
+                        <p:par>
+                          <p:cTn id="64" fill="hold">
+                            <p:stCondLst>
+                              <p:cond delay="0"/>
+                            </p:stCondLst>
+                            <p:childTnLst>
+                              <p:par>
+                                <p:cTn id="65" presetID="1" presetClass="entr" presetSubtype="0" fill="hold" nodeType="clickEffect">
+                                  <p:stCondLst>
+                                    <p:cond delay="0"/>
+                                  </p:stCondLst>
+                                  <p:childTnLst>
+                                    <p:set>
+                                      <p:cBhvr>
+                                        <p:cTn id="66" dur="1" fill="hold">
+                                          <p:stCondLst>
+                                            <p:cond delay="0"/>
+                                          </p:stCondLst>
+                                        </p:cTn>
+                                        <p:tgtEl>
+                                          <p:spTgt spid="3">
+                                            <p:txEl>
+                                              <p:pRg st="15" end="15"/>
+                                            </p:txEl>
+                                          </p:spTgt>
+                                        </p:tgtEl>
+                                        <p:attrNameLst>
+                                          <p:attrName>style.visibility</p:attrName>
+                                        </p:attrNameLst>
+                                      </p:cBhvr>
+                                      <p:to>
+                                        <p:strVal val="visible"/>
+                                      </p:to>
+                                    </p:set>
+                                  </p:childTnLst>
+                                </p:cTn>
+                              </p:par>
+                            </p:childTnLst>
+                          </p:cTn>
+                        </p:par>
+                      </p:childTnLst>
+                    </p:cTn>
+                  </p:par>
+                  <p:par>
+                    <p:cTn id="67" fill="hold">
+                      <p:stCondLst>
+                        <p:cond delay="indefinite"/>
+                      </p:stCondLst>
+                      <p:childTnLst>
+                        <p:par>
+                          <p:cTn id="68" fill="hold">
+                            <p:stCondLst>
+                              <p:cond delay="0"/>
+                            </p:stCondLst>
+                            <p:childTnLst>
+                              <p:par>
+                                <p:cTn id="69" presetID="1" presetClass="entr" presetSubtype="0" fill="hold" nodeType="clickEffect">
+                                  <p:stCondLst>
+                                    <p:cond delay="0"/>
+                                  </p:stCondLst>
+                                  <p:childTnLst>
+                                    <p:set>
+                                      <p:cBhvr>
+                                        <p:cTn id="70" dur="1" fill="hold">
+                                          <p:stCondLst>
+                                            <p:cond delay="0"/>
+                                          </p:stCondLst>
+                                        </p:cTn>
+                                        <p:tgtEl>
+                                          <p:spTgt spid="3">
+                                            <p:txEl>
+                                              <p:pRg st="16" end="16"/>
                                             </p:txEl>
                                           </p:spTgt>
                                         </p:tgtEl>
@@ -9251,7 +9825,7 @@
         <p:spPr>
           <a:xfrm>
             <a:off x="6443090" y="2626078"/>
-            <a:ext cx="3848100" cy="1477328"/>
+            <a:ext cx="3848100" cy="1754326"/>
           </a:xfrm>
           <a:prstGeom prst="rect">
             <a:avLst/>
@@ -9271,8 +9845,23 @@
                 </a:solidFill>
                 <a:latin typeface="Consolas" panose="020B0609020204030204" pitchFamily="49" charset="0"/>
               </a:rPr>
-              <a:t>Al final de la sesión, serás capaz de crear un pipeline básico en R que transforme datos brutos en una base lista para análisis.</a:t>
-            </a:r>
+              <a:t>Al final de la sesión, serás capaz de crear un pipeline básico en R que transforme datos brutos en una base lista para </a:t>
+            </a:r>
+            <a:r>
+              <a:rPr lang="es-MX" dirty="0" smtClean="0">
+                <a:solidFill>
+                  <a:schemeClr val="accent1"/>
+                </a:solidFill>
+                <a:latin typeface="Consolas" panose="020B0609020204030204" pitchFamily="49" charset="0"/>
+              </a:rPr>
+              <a:t>análisis y toma de decisión.</a:t>
+            </a:r>
+            <a:endParaRPr lang="es-MX" dirty="0">
+              <a:solidFill>
+                <a:schemeClr val="accent1"/>
+              </a:solidFill>
+              <a:latin typeface="Consolas" panose="020B0609020204030204" pitchFamily="49" charset="0"/>
+            </a:endParaRPr>
           </a:p>
         </p:txBody>
       </p:sp>
